--- a/Foundation_F1/Workshop/F1-W02_Apply_Workshop_L03-L04_Labels_at_the_Market_Stall.pptx
+++ b/Foundation_F1/Workshop/F1-W02_Apply_Workshop_L03-L04_Labels_at_the_Market_Stall.pptx
@@ -5961,7 +5961,7 @@
                 <a:latin typeface="Calibri" pitchFamily="34" charset="0"/>
                 <a:cs typeface="Amiri" pitchFamily="2" charset="-78"/>
               </a:rPr>
-              <a:t>heavy t · compare </a:t>
+              <a:t>heavy t · compare ‏</a:t>
             </a:r>
             <a:pPr algn="l" indent="0" marL="0">
               <a:buNone/>
@@ -5976,6 +5976,19 @@
                 <a:cs typeface="Amiri" pitchFamily="2" charset="-78"/>
               </a:rPr>
               <a:t>ت</a:t>
+            </a:r>
+            <a:pPr algn="l" indent="0" marL="0">
+              <a:buNone/>
+            </a:pPr>
+            <a:r>
+              <a:rPr lang="en-US" sz="1100" dirty="0">
+                <a:solidFill>
+                  <a:srgbClr val="5A6472"/>
+                </a:solidFill>
+                <a:latin typeface="Calibri" pitchFamily="34" charset="0"/>
+                <a:cs typeface="Amiri" pitchFamily="2" charset="-78"/>
+              </a:rPr>
+              <a:t>‏</a:t>
             </a:r>
             <a:endParaRPr lang="en-US" sz="1100" dirty="0"/>
           </a:p>
@@ -17123,6 +17136,19 @@
               <a:buNone/>
             </a:pPr>
             <a:r>
+              <a:rPr lang="en-US" sz="1150" b="1" dirty="0">
+                <a:solidFill>
+                  <a:srgbClr val="1B3B6F"/>
+                </a:solidFill>
+                <a:latin typeface="Calibri" pitchFamily="34" charset="0"/>
+                <a:cs typeface="Amiri" pitchFamily="2" charset="-78"/>
+              </a:rPr>
+              <a:t>‏</a:t>
+            </a:r>
+            <a:pPr algn="l" indent="0" marL="0">
+              <a:buNone/>
+            </a:pPr>
+            <a:r>
               <a:rPr lang="ar-SA" altLang="en-US" sz="1500" b="1" dirty="0">
                 <a:solidFill>
                   <a:srgbClr val="1B3B6F"/>
@@ -17144,7 +17170,7 @@
                 <a:latin typeface="Calibri" pitchFamily="34" charset="0"/>
                 <a:cs typeface="Amiri" pitchFamily="2" charset="-78"/>
               </a:rPr>
-              <a:t> is the emphatic t.</a:t>
+              <a:t>‏ is the emphatic t.</a:t>
             </a:r>
             <a:endParaRPr lang="en-US" sz="1150" dirty="0"/>
           </a:p>
@@ -19536,7 +19562,7 @@
                 <a:latin typeface="Calibri" pitchFamily="34" charset="0"/>
                 <a:cs typeface="Amiri" pitchFamily="2" charset="-78"/>
               </a:rPr>
-              <a:t>☐  Dots: right number, right place (</a:t>
+              <a:t>☐  Dots: right number, right place (‏</a:t>
             </a:r>
             <a:pPr algn="l" indent="0" marL="0">
               <a:buNone/>
@@ -19563,7 +19589,7 @@
                 <a:latin typeface="Calibri" pitchFamily="34" charset="0"/>
                 <a:cs typeface="Amiri" pitchFamily="2" charset="-78"/>
               </a:rPr>
-              <a:t> one · </a:t>
+              <a:t>‏ one · ‏</a:t>
             </a:r>
             <a:pPr algn="l" indent="0" marL="0">
               <a:buNone/>
@@ -19590,7 +19616,7 @@
                 <a:latin typeface="Calibri" pitchFamily="34" charset="0"/>
                 <a:cs typeface="Amiri" pitchFamily="2" charset="-78"/>
               </a:rPr>
-              <a:t> two).</a:t>
+              <a:t>‏ two).</a:t>
             </a:r>
             <a:endParaRPr lang="en-US" sz="1200" dirty="0"/>
           </a:p>
@@ -19628,7 +19654,7 @@
                 <a:latin typeface="Calibri" pitchFamily="34" charset="0"/>
                 <a:cs typeface="Amiri" pitchFamily="2" charset="-78"/>
               </a:rPr>
-              <a:t>☐  Long vowels written with </a:t>
+              <a:t>☐  Long vowels written with ‏</a:t>
             </a:r>
             <a:pPr algn="l" indent="0" marL="0">
               <a:buNone/>
@@ -19709,7 +19735,7 @@
                 <a:latin typeface="Calibri" pitchFamily="34" charset="0"/>
                 <a:cs typeface="Amiri" pitchFamily="2" charset="-78"/>
               </a:rPr>
-              <a:t>.</a:t>
+              <a:t>‏.</a:t>
             </a:r>
             <a:endParaRPr lang="en-US" sz="1200" dirty="0"/>
           </a:p>
@@ -23295,7 +23321,7 @@
                 <a:latin typeface="Calibri" pitchFamily="34" charset="0"/>
                 <a:cs typeface="Amiri" pitchFamily="2" charset="-78"/>
               </a:rPr>
-              <a:t>join letters correctly — and leave a gap after </a:t>
+              <a:t>join letters correctly — and leave a gap after ‏</a:t>
             </a:r>
             <a:pPr algn="l" indent="0" marL="0">
               <a:buNone/>
@@ -23322,7 +23348,7 @@
                 <a:latin typeface="Calibri" pitchFamily="34" charset="0"/>
                 <a:cs typeface="Amiri" pitchFamily="2" charset="-78"/>
               </a:rPr>
-              <a:t>?</a:t>
+              <a:t>‏?</a:t>
             </a:r>
             <a:endParaRPr lang="en-US" sz="1100" dirty="0"/>
           </a:p>
